--- a/extrapolation-papers/외삽_50분_발표자료_v6.pptx
+++ b/extrapolation-papers/외삽_50분_발표자료_v6.pptx
@@ -1943,7 +1943,7 @@
           </a:p>
           <a:p>
             <a:r>
-              <a:t>관통 문장 → 4파트 스토리(화살표) → 질문 리프레임 → 필독 3칩.</a:t>
+              <a:t>관통 문장(hero) → 2×2 스토리(①~④) → 필독 3편.</a:t>
             </a:r>
           </a:p>
           <a:p>
@@ -2128,7 +2128,7 @@
           </a:p>
           <a:p>
             <a:r>
-              <a:t>대본: '가정'이 오늘 키워드입니다. 왼쪽 그림 — 훈련점(●)은 전부 같습니다. 가정 A(선형)·B(지수)·C(비선형)만 바꾸면 x&gt;2 밖에서 곡선이 완전히 달라집니다. 오른쪽 ① 정의, ② 왜 필요(Pfister), ③ 주입 위치. 아래 ④ 그림 해석. 이후 '가정을 넣는다'는 이 뜻으로만 쓰겠습니다.</a:t>
+              <a:t>대본: '가정'이 오늘 키워드입니다. 왼쪽 그림 — 훈련점(●)은 같습니다. 훈련 범위 안에서는 **하나의 적합**처럼 보이고, 데이터만으로는 선형·지수·비선형 중 어느 가정이 맞는지 고를 수 없습니다. x=2 밖으로 **가정(prior)을 연장**하는 순간 A·B·C 예측이 완전히 갈립니다. 세 모델을 동시에 학습한 그림이 **아닙니다**. 오른쪽 ① 정의, ② 왜 필요(Pfister), ③ 주입 위치. 아래 ④ 그림 해석. 이후 '가정을 넣는다'는 이 뜻으로만 쓰겠습니다.</a:t>
             </a:r>
           </a:p>
         </p:txBody>
@@ -27169,7 +27169,7 @@
         </p:nvSpPr>
         <p:spPr>
           <a:xfrm>
-            <a:off x="411480" y="1024128"/>
+            <a:off x="411480" y="1051560"/>
             <a:ext cx="11365992" cy="749808"/>
           </a:xfrm>
           <a:prstGeom prst="roundRect">
@@ -27216,8 +27216,8 @@
         </p:nvSpPr>
         <p:spPr>
           <a:xfrm>
-            <a:off x="594360" y="1133856"/>
-            <a:ext cx="10972800" cy="530352"/>
+            <a:off x="594360" y="1115568"/>
+            <a:ext cx="10972800" cy="658368"/>
           </a:xfrm>
           <a:prstGeom prst="rect">
             <a:avLst/>
@@ -27232,24 +27232,134 @@
           <a:p>
             <a:pPr algn="ctr"/>
             <a:r>
-              <a:rPr sz="2200" b="1">
+              <a:rPr sz="2100" b="1">
                 <a:solidFill>
                   <a:srgbClr val="FFFFFF"/>
                 </a:solidFill>
                 <a:latin typeface="Apple SD Gothic Neo"/>
                 <a:ea typeface="Apple SD Gothic Neo"/>
               </a:rPr>
-              <a:t>밖을 지탱하는 것은 데이터가 아니라 </a:t>
-            </a:r>
-            <a:r>
-              <a:rPr sz="2200" b="1">
+              <a:t>train </a:t>
+            </a:r>
+            <a:r>
+              <a:rPr sz="2100" b="1">
                 <a:solidFill>
                   <a:srgbClr val="FFFFFF"/>
                 </a:solidFill>
                 <a:latin typeface="Apple SD Gothic Neo"/>
                 <a:ea typeface="Apple SD Gothic Neo"/>
               </a:rPr>
+              <a:t>밖</a:t>
+            </a:r>
+            <a:r>
+              <a:rPr sz="2100" b="1">
+                <a:solidFill>
+                  <a:srgbClr val="FFFFFF"/>
+                </a:solidFill>
+                <a:latin typeface="Apple SD Gothic Neo"/>
+                <a:ea typeface="Apple SD Gothic Neo"/>
+              </a:rPr>
+              <a:t>은 </a:t>
+            </a:r>
+            <a:r>
+              <a:rPr sz="2100" b="1">
+                <a:solidFill>
+                  <a:srgbClr val="FFFFFF"/>
+                </a:solidFill>
+                <a:latin typeface="Apple SD Gothic Neo"/>
+                <a:ea typeface="Apple SD Gothic Neo"/>
+              </a:rPr>
+              <a:t>데이터</a:t>
+            </a:r>
+            <a:r>
+              <a:rPr sz="2100" b="1">
+                <a:solidFill>
+                  <a:srgbClr val="FFFFFF"/>
+                </a:solidFill>
+                <a:latin typeface="Apple SD Gothic Neo"/>
+                <a:ea typeface="Apple SD Gothic Neo"/>
+              </a:rPr>
+              <a:t>가 아니라 </a:t>
+            </a:r>
+            <a:r>
+              <a:rPr sz="2100" b="1">
+                <a:solidFill>
+                  <a:srgbClr val="FFFFFF"/>
+                </a:solidFill>
+                <a:latin typeface="Apple SD Gothic Neo"/>
+                <a:ea typeface="Apple SD Gothic Neo"/>
+              </a:rPr>
               <a:t>가정</a:t>
+            </a:r>
+            <a:r>
+              <a:rPr sz="2100" b="1">
+                <a:solidFill>
+                  <a:srgbClr val="FFFFFF"/>
+                </a:solidFill>
+                <a:latin typeface="Apple SD Gothic Neo"/>
+                <a:ea typeface="Apple SD Gothic Neo"/>
+              </a:rPr>
+              <a:t>이 지탱한다</a:t>
+            </a:r>
+          </a:p>
+          <a:p>
+            <a:pPr algn="ctr">
+              <a:spcBef>
+                <a:spcPts val="500"/>
+              </a:spcBef>
+              <a:spcAft>
+                <a:spcPts val="200"/>
+              </a:spcAft>
+            </a:pPr>
+            <a:r>
+              <a:rPr sz="1300" b="0">
+                <a:solidFill>
+                  <a:srgbClr val="B8C4D0"/>
+                </a:solidFill>
+                <a:latin typeface="Apple SD Gothic Neo"/>
+                <a:ea typeface="Apple SD Gothic Neo"/>
+              </a:rPr>
+              <a:t>“외삽 되나?” → </a:t>
+            </a:r>
+            <a:r>
+              <a:rPr sz="1300" b="1">
+                <a:solidFill>
+                  <a:srgbClr val="B8C4D0"/>
+                </a:solidFill>
+                <a:latin typeface="Apple SD Gothic Neo"/>
+                <a:ea typeface="Apple SD Gothic Neo"/>
+              </a:rPr>
+              <a:t>가정</a:t>
+            </a:r>
+            <a:r>
+              <a:rPr sz="1300" b="0">
+                <a:solidFill>
+                  <a:srgbClr val="B8C4D0"/>
+                </a:solidFill>
+                <a:latin typeface="Apple SD Gothic Neo"/>
+                <a:ea typeface="Apple SD Gothic Neo"/>
+              </a:rPr>
+              <a:t>이 맞고 · </a:t>
+            </a:r>
+            <a:r>
+              <a:rPr sz="1300" b="1">
+                <a:solidFill>
+                  <a:srgbClr val="B8C4D0"/>
+                </a:solidFill>
+                <a:latin typeface="Apple SD Gothic Neo"/>
+                <a:ea typeface="Apple SD Gothic Neo"/>
+              </a:rPr>
+              <a:t>밖에서 시험</a:t>
+            </a:r>
+            <a:r>
+              <a:rPr sz="1300" b="0">
+                <a:solidFill>
+                  <a:srgbClr val="B8C4D0"/>
+                </a:solidFill>
+                <a:latin typeface="Apple SD Gothic Neo"/>
+                <a:ea typeface="Apple SD Gothic Neo"/>
+              </a:rPr>
+              <a:t>했는가?</a:t>
             </a:r>
           </a:p>
         </p:txBody>
@@ -27262,8 +27372,8 @@
         </p:nvSpPr>
         <p:spPr>
           <a:xfrm>
-            <a:off x="320040" y="1901952"/>
-            <a:ext cx="2724912" cy="1298448"/>
+            <a:off x="411480" y="1938528"/>
+            <a:ext cx="5559552" cy="1078992"/>
           </a:xfrm>
           <a:prstGeom prst="roundRect">
             <a:avLst>
@@ -27309,8 +27419,8 @@
         </p:nvSpPr>
         <p:spPr>
           <a:xfrm>
-            <a:off x="320040" y="1901952"/>
-            <a:ext cx="54864" cy="1298448"/>
+            <a:off x="411480" y="1938528"/>
+            <a:ext cx="54864" cy="1078992"/>
           </a:xfrm>
           <a:prstGeom prst="rect">
             <a:avLst/>
@@ -27352,8 +27462,8 @@
         </p:nvSpPr>
         <p:spPr>
           <a:xfrm>
-            <a:off x="521208" y="2029968"/>
-            <a:ext cx="2377440" cy="1097280"/>
+            <a:off x="612648" y="2066544"/>
+            <a:ext cx="5212080" cy="877824"/>
           </a:xfrm>
           <a:prstGeom prst="rect">
             <a:avLst/>
@@ -27375,7 +27485,7 @@
                 <a:latin typeface="Apple SD Gothic Neo"/>
                 <a:ea typeface="Apple SD Gothic Neo"/>
               </a:rPr>
-              <a:t>1부 · 정의</a:t>
+              <a:t>① 1부 · 정의</a:t>
             </a:r>
           </a:p>
           <a:p>
@@ -27395,7 +27505,7 @@
                 <a:latin typeface="Apple SD Gothic Neo"/>
                 <a:ea typeface="Apple SD Gothic Neo"/>
               </a:rPr>
-              <a:t>–  외삽 = 훈련 범위(hull) </a:t>
+              <a:t>–  외삽 = hull </a:t>
             </a:r>
             <a:r>
               <a:rPr sz="1100" b="1">
@@ -27415,7 +27525,7 @@
                 <a:latin typeface="Apple SD Gothic Neo"/>
                 <a:ea typeface="Apple SD Gothic Neo"/>
               </a:rPr>
-              <a:t>을 예측</a:t>
+              <a:t> 예측</a:t>
             </a:r>
           </a:p>
           <a:p>
@@ -27435,57 +27545,21 @@
                 <a:latin typeface="Apple SD Gothic Neo"/>
                 <a:ea typeface="Apple SD Gothic Neo"/>
               </a:rPr>
-              <a:t>–  연속값 회귀 · 분류 DG와 다름</a:t>
-            </a:r>
-          </a:p>
-        </p:txBody>
-      </p:sp>
-      <p:sp>
-        <p:nvSpPr>
-          <p:cNvPr id="12" name="TextBox 11"/>
-          <p:cNvSpPr txBox="1"/>
-          <p:nvPr/>
-        </p:nvSpPr>
-        <p:spPr>
-          <a:xfrm>
-            <a:off x="3063240" y="2395728"/>
-            <a:ext cx="109728" cy="274320"/>
-          </a:xfrm>
-          <a:prstGeom prst="rect">
-            <a:avLst/>
-          </a:prstGeom>
-          <a:noFill/>
-        </p:spPr>
-        <p:txBody>
-          <a:bodyPr wrap="square">
-            <a:spAutoFit/>
-          </a:bodyPr>
-          <a:lstStyle/>
-          <a:p>
-            <a:pPr algn="ctr"/>
-            <a:r>
-              <a:rPr sz="1400" b="1">
-                <a:solidFill>
-                  <a:srgbClr val="6E7C8C"/>
-                </a:solidFill>
-                <a:latin typeface="Apple SD Gothic Neo"/>
-                <a:ea typeface="Apple SD Gothic Neo"/>
-              </a:rPr>
-              <a:t>→</a:t>
-            </a:r>
-          </a:p>
-        </p:txBody>
-      </p:sp>
-      <p:sp>
-        <p:nvSpPr>
-          <p:cNvPr id="13" name="Rounded Rectangle 12"/>
+              <a:t>–  연속 회귀 · 분류 DG와 다름</a:t>
+            </a:r>
+          </a:p>
+        </p:txBody>
+      </p:sp>
+      <p:sp>
+        <p:nvSpPr>
+          <p:cNvPr id="12" name="Rounded Rectangle 11"/>
           <p:cNvSpPr/>
           <p:nvPr/>
         </p:nvSpPr>
         <p:spPr>
           <a:xfrm>
-            <a:off x="2608717683240" y="1901952"/>
-            <a:ext cx="2724912" cy="1298448"/>
+            <a:off x="5200712590680" y="1938528"/>
+            <a:ext cx="5559552" cy="1078992"/>
           </a:xfrm>
           <a:prstGeom prst="roundRect">
             <a:avLst>
@@ -27525,14 +27599,14 @@
       </p:sp>
       <p:sp>
         <p:nvSpPr>
-          <p:cNvPr id="14" name="Rectangle 13"/>
+          <p:cNvPr id="13" name="Rectangle 12"/>
           <p:cNvSpPr/>
           <p:nvPr/>
         </p:nvSpPr>
         <p:spPr>
           <a:xfrm>
-            <a:off x="2608717683240" y="1901952"/>
-            <a:ext cx="54864" cy="1298448"/>
+            <a:off x="5200712590680" y="1938528"/>
+            <a:ext cx="54864" cy="1078992"/>
           </a:xfrm>
           <a:prstGeom prst="rect">
             <a:avLst/>
@@ -27568,14 +27642,14 @@
       </p:sp>
       <p:sp>
         <p:nvSpPr>
-          <p:cNvPr id="15" name="TextBox 14"/>
+          <p:cNvPr id="14" name="TextBox 13"/>
           <p:cNvSpPr txBox="1"/>
           <p:nvPr/>
         </p:nvSpPr>
         <p:spPr>
           <a:xfrm>
-            <a:off x="2608717884408" y="2029968"/>
-            <a:ext cx="2377440" cy="1097280"/>
+            <a:off x="5200712791848" y="2066544"/>
+            <a:ext cx="5212080" cy="877824"/>
           </a:xfrm>
           <a:prstGeom prst="rect">
             <a:avLst/>
@@ -27597,7 +27671,7 @@
                 <a:latin typeface="Apple SD Gothic Neo"/>
                 <a:ea typeface="Apple SD Gothic Neo"/>
               </a:rPr>
-              <a:t>2부 · 실패</a:t>
+              <a:t>② 2부 · 실패</a:t>
             </a:r>
           </a:p>
           <a:p>
@@ -27617,7 +27691,7 @@
                 <a:latin typeface="Apple SD Gothic Neo"/>
                 <a:ea typeface="Apple SD Gothic Neo"/>
               </a:rPr>
-              <a:t>–  데이터만으론 밖의 모양을 </a:t>
+              <a:t>–  데이터만으론 밖 </a:t>
             </a:r>
             <a:r>
               <a:rPr sz="1100" b="1">
@@ -27627,7 +27701,17 @@
                 <a:latin typeface="Apple SD Gothic Neo"/>
                 <a:ea typeface="Apple SD Gothic Neo"/>
               </a:rPr>
-              <a:t>정할 수 없다</a:t>
+              <a:t>모양</a:t>
+            </a:r>
+            <a:r>
+              <a:rPr sz="1100" b="0">
+                <a:solidFill>
+                  <a:srgbClr val="A0ADBC"/>
+                </a:solidFill>
+                <a:latin typeface="Apple SD Gothic Neo"/>
+                <a:ea typeface="Apple SD Gothic Neo"/>
+              </a:rPr>
+              <a:t> 못 정함</a:t>
             </a:r>
           </a:p>
           <a:p>
@@ -27654,50 +27738,14 @@
       </p:sp>
       <p:sp>
         <p:nvSpPr>
-          <p:cNvPr id="16" name="TextBox 15"/>
-          <p:cNvSpPr txBox="1"/>
-          <p:nvPr/>
-        </p:nvSpPr>
-        <p:spPr>
-          <a:xfrm>
-            <a:off x="2608720426440" y="2395728"/>
-            <a:ext cx="109728" cy="274320"/>
-          </a:xfrm>
-          <a:prstGeom prst="rect">
-            <a:avLst/>
-          </a:prstGeom>
-          <a:noFill/>
-        </p:spPr>
-        <p:txBody>
-          <a:bodyPr wrap="square">
-            <a:spAutoFit/>
-          </a:bodyPr>
-          <a:lstStyle/>
-          <a:p>
-            <a:pPr algn="ctr"/>
-            <a:r>
-              <a:rPr sz="1400" b="1">
-                <a:solidFill>
-                  <a:srgbClr val="6E7C8C"/>
-                </a:solidFill>
-                <a:latin typeface="Apple SD Gothic Neo"/>
-                <a:ea typeface="Apple SD Gothic Neo"/>
-              </a:rPr>
-              <a:t>→</a:t>
-            </a:r>
-          </a:p>
-        </p:txBody>
-      </p:sp>
-      <p:sp>
-        <p:nvSpPr>
-          <p:cNvPr id="17" name="Rounded Rectangle 16"/>
+          <p:cNvPr id="15" name="Rounded Rectangle 14"/>
           <p:cNvSpPr/>
           <p:nvPr/>
         </p:nvSpPr>
         <p:spPr>
           <a:xfrm>
-            <a:off x="5217435046440" y="1901952"/>
-            <a:ext cx="2724912" cy="1298448"/>
+            <a:off x="411480" y="3127248"/>
+            <a:ext cx="5559552" cy="1078992"/>
           </a:xfrm>
           <a:prstGeom prst="roundRect">
             <a:avLst>
@@ -27737,14 +27785,14 @@
       </p:sp>
       <p:sp>
         <p:nvSpPr>
-          <p:cNvPr id="18" name="Rectangle 17"/>
+          <p:cNvPr id="16" name="Rectangle 15"/>
           <p:cNvSpPr/>
           <p:nvPr/>
         </p:nvSpPr>
         <p:spPr>
           <a:xfrm>
-            <a:off x="5217435046440" y="1901952"/>
-            <a:ext cx="54864" cy="1298448"/>
+            <a:off x="411480" y="3127248"/>
+            <a:ext cx="54864" cy="1078992"/>
           </a:xfrm>
           <a:prstGeom prst="rect">
             <a:avLst/>
@@ -27780,14 +27828,14 @@
       </p:sp>
       <p:sp>
         <p:nvSpPr>
-          <p:cNvPr id="19" name="TextBox 18"/>
+          <p:cNvPr id="17" name="TextBox 16"/>
           <p:cNvSpPr txBox="1"/>
           <p:nvPr/>
         </p:nvSpPr>
         <p:spPr>
           <a:xfrm>
-            <a:off x="5217435247608" y="2029968"/>
-            <a:ext cx="2377440" cy="1097280"/>
+            <a:off x="612648" y="3255264"/>
+            <a:ext cx="5212080" cy="877824"/>
           </a:xfrm>
           <a:prstGeom prst="rect">
             <a:avLst/>
@@ -27809,7 +27857,7 @@
                 <a:latin typeface="Apple SD Gothic Neo"/>
                 <a:ea typeface="Apple SD Gothic Neo"/>
               </a:rPr>
-              <a:t>3부 · 대응</a:t>
+              <a:t>③ 3부 · 대응</a:t>
             </a:r>
           </a:p>
           <a:p>
@@ -27829,7 +27877,7 @@
                 <a:latin typeface="Apple SD Gothic Neo"/>
                 <a:ea typeface="Apple SD Gothic Neo"/>
               </a:rPr>
-              <a:t>–  아는 지식만큼 </a:t>
+              <a:t>–  아는 만큼 </a:t>
             </a:r>
             <a:r>
               <a:rPr sz="1100" b="1">
@@ -27839,7 +27887,17 @@
                 <a:latin typeface="Apple SD Gothic Neo"/>
                 <a:ea typeface="Apple SD Gothic Neo"/>
               </a:rPr>
-              <a:t>가정을 넣는다</a:t>
+              <a:t>가정</a:t>
+            </a:r>
+            <a:r>
+              <a:rPr sz="1100" b="0">
+                <a:solidFill>
+                  <a:srgbClr val="A0ADBC"/>
+                </a:solidFill>
+                <a:latin typeface="Apple SD Gothic Neo"/>
+                <a:ea typeface="Apple SD Gothic Neo"/>
+              </a:rPr>
+              <a:t>을 넣는다</a:t>
             </a:r>
           </a:p>
           <a:p>
@@ -27859,57 +27917,21 @@
                 <a:latin typeface="Apple SD Gothic Neo"/>
                 <a:ea typeface="Apple SD Gothic Neo"/>
               </a:rPr>
-              <a:t>–  식 · 방향 · 물리 · 모름(UQ)</a:t>
-            </a:r>
-          </a:p>
-        </p:txBody>
-      </p:sp>
-      <p:sp>
-        <p:nvSpPr>
-          <p:cNvPr id="20" name="TextBox 19"/>
-          <p:cNvSpPr txBox="1"/>
-          <p:nvPr/>
-        </p:nvSpPr>
-        <p:spPr>
-          <a:xfrm>
-            <a:off x="5217437789640" y="2395728"/>
-            <a:ext cx="109728" cy="274320"/>
-          </a:xfrm>
-          <a:prstGeom prst="rect">
-            <a:avLst/>
-          </a:prstGeom>
-          <a:noFill/>
-        </p:spPr>
-        <p:txBody>
-          <a:bodyPr wrap="square">
-            <a:spAutoFit/>
-          </a:bodyPr>
-          <a:lstStyle/>
-          <a:p>
-            <a:pPr algn="ctr"/>
-            <a:r>
-              <a:rPr sz="1400" b="1">
-                <a:solidFill>
-                  <a:srgbClr val="6E7C8C"/>
-                </a:solidFill>
-                <a:latin typeface="Apple SD Gothic Neo"/>
-                <a:ea typeface="Apple SD Gothic Neo"/>
-              </a:rPr>
-              <a:t>→</a:t>
-            </a:r>
-          </a:p>
-        </p:txBody>
-      </p:sp>
-      <p:sp>
-        <p:nvSpPr>
-          <p:cNvPr id="21" name="Rounded Rectangle 20"/>
+              <a:t>–  식 · 방향 · 물리 · 모르면 UQ</a:t>
+            </a:r>
+          </a:p>
+        </p:txBody>
+      </p:sp>
+      <p:sp>
+        <p:nvSpPr>
+          <p:cNvPr id="18" name="Rounded Rectangle 17"/>
           <p:cNvSpPr/>
           <p:nvPr/>
         </p:nvSpPr>
         <p:spPr>
           <a:xfrm>
-            <a:off x="7826152409640" y="1901952"/>
-            <a:ext cx="2724912" cy="1298448"/>
+            <a:off x="5200712590680" y="3127248"/>
+            <a:ext cx="5559552" cy="1078992"/>
           </a:xfrm>
           <a:prstGeom prst="roundRect">
             <a:avLst>
@@ -27949,14 +27971,14 @@
       </p:sp>
       <p:sp>
         <p:nvSpPr>
-          <p:cNvPr id="22" name="Rectangle 21"/>
+          <p:cNvPr id="19" name="Rectangle 18"/>
           <p:cNvSpPr/>
           <p:nvPr/>
         </p:nvSpPr>
         <p:spPr>
           <a:xfrm>
-            <a:off x="7826152409640" y="1901952"/>
-            <a:ext cx="54864" cy="1298448"/>
+            <a:off x="5200712590680" y="3127248"/>
+            <a:ext cx="54864" cy="1078992"/>
           </a:xfrm>
           <a:prstGeom prst="rect">
             <a:avLst/>
@@ -27992,14 +28014,14 @@
       </p:sp>
       <p:sp>
         <p:nvSpPr>
-          <p:cNvPr id="23" name="TextBox 22"/>
+          <p:cNvPr id="20" name="TextBox 19"/>
           <p:cNvSpPr txBox="1"/>
           <p:nvPr/>
         </p:nvSpPr>
         <p:spPr>
           <a:xfrm>
-            <a:off x="7826152610808" y="2029968"/>
-            <a:ext cx="2377440" cy="1097280"/>
+            <a:off x="5200712791848" y="3255264"/>
+            <a:ext cx="5212080" cy="877824"/>
           </a:xfrm>
           <a:prstGeom prst="rect">
             <a:avLst/>
@@ -28021,7 +28043,7 @@
                 <a:latin typeface="Apple SD Gothic Neo"/>
                 <a:ea typeface="Apple SD Gothic Neo"/>
               </a:rPr>
-              <a:t>실무 · 검증</a:t>
+              <a:t>④ 실무 · 검증</a:t>
             </a:r>
           </a:p>
           <a:p>
@@ -28041,7 +28063,7 @@
                 <a:latin typeface="Apple SD Gothic Neo"/>
                 <a:ea typeface="Apple SD Gothic Neo"/>
               </a:rPr>
-              <a:t>–  밖 시험으로 </a:t>
+              <a:t>–  </a:t>
             </a:r>
             <a:r>
               <a:rPr sz="1100" b="1">
@@ -28051,7 +28073,7 @@
                 <a:latin typeface="Apple SD Gothic Neo"/>
                 <a:ea typeface="Apple SD Gothic Neo"/>
               </a:rPr>
-              <a:t>확인</a:t>
+              <a:t>밖 holdout</a:t>
             </a:r>
             <a:r>
               <a:rPr sz="1100" b="0">
@@ -28061,7 +28083,7 @@
                 <a:latin typeface="Apple SD Gothic Neo"/>
                 <a:ea typeface="Apple SD Gothic Neo"/>
               </a:rPr>
-              <a:t>하고 배포</a:t>
+              <a:t>으로 확인 후 배포</a:t>
             </a:r>
           </a:p>
           <a:p>
@@ -28091,7 +28113,7 @@
                 <a:latin typeface="Apple SD Gothic Neo"/>
                 <a:ea typeface="Apple SD Gothic Neo"/>
               </a:rPr>
-              <a:t>예측하지 않음</a:t>
+              <a:t>예측 안 함</a:t>
             </a:r>
             <a:r>
               <a:rPr sz="1100" b="0">
@@ -28108,14 +28130,796 @@
       </p:sp>
       <p:sp>
         <p:nvSpPr>
-          <p:cNvPr id="24" name="Rounded Rectangle 23"/>
+          <p:cNvPr id="21" name="TextBox 20"/>
+          <p:cNvSpPr txBox="1"/>
+          <p:nvPr/>
+        </p:nvSpPr>
+        <p:spPr>
+          <a:xfrm>
+            <a:off x="411480" y="4315968"/>
+            <a:ext cx="2286000" cy="237744"/>
+          </a:xfrm>
+          <a:prstGeom prst="rect">
+            <a:avLst/>
+          </a:prstGeom>
+          <a:noFill/>
+        </p:spPr>
+        <p:txBody>
+          <a:bodyPr wrap="square">
+            <a:spAutoFit/>
+          </a:bodyPr>
+          <a:lstStyle/>
+          <a:p>
+            <a:pPr algn="l"/>
+            <a:r>
+              <a:rPr sz="1100" b="1">
+                <a:solidFill>
+                  <a:srgbClr val="3DD6C6"/>
+                </a:solidFill>
+                <a:latin typeface="Apple SD Gothic Neo"/>
+                <a:ea typeface="Apple SD Gothic Neo"/>
+              </a:rPr>
+              <a:t>필독 3편</a:t>
+            </a:r>
+          </a:p>
+        </p:txBody>
+      </p:sp>
+      <p:sp>
+        <p:nvSpPr>
+          <p:cNvPr id="22" name="Rounded Rectangle 21"/>
           <p:cNvSpPr/>
           <p:nvPr/>
         </p:nvSpPr>
         <p:spPr>
           <a:xfrm>
-            <a:off x="411480" y="3310128"/>
-            <a:ext cx="11365992" cy="530352"/>
+            <a:off x="411480" y="4590288"/>
+            <a:ext cx="3639312" cy="987552"/>
+          </a:xfrm>
+          <a:prstGeom prst="roundRect">
+            <a:avLst>
+              <a:gd name="adj" fmla="val 5000"/>
+            </a:avLst>
+          </a:prstGeom>
+          <a:solidFill>
+            <a:srgbClr val="141B24"/>
+          </a:solidFill>
+          <a:ln w="9525">
+            <a:solidFill>
+              <a:srgbClr val="2C3848"/>
+            </a:solidFill>
+          </a:ln>
+        </p:spPr>
+        <p:style>
+          <a:lnRef idx="1">
+            <a:schemeClr val="accent1"/>
+          </a:lnRef>
+          <a:fillRef idx="3">
+            <a:schemeClr val="accent1"/>
+          </a:fillRef>
+          <a:effectRef idx="2">
+            <a:schemeClr val="accent1"/>
+          </a:effectRef>
+          <a:fontRef idx="minor">
+            <a:schemeClr val="lt1"/>
+          </a:fontRef>
+        </p:style>
+        <p:txBody>
+          <a:bodyPr rtlCol="0" anchor="ctr"/>
+          <a:lstStyle/>
+          <a:p>
+            <a:pPr algn="ctr"/>
+          </a:p>
+        </p:txBody>
+      </p:sp>
+      <p:sp>
+        <p:nvSpPr>
+          <p:cNvPr id="23" name="Rectangle 22"/>
+          <p:cNvSpPr/>
+          <p:nvPr/>
+        </p:nvSpPr>
+        <p:spPr>
+          <a:xfrm>
+            <a:off x="411480" y="4590288"/>
+            <a:ext cx="54864" cy="987552"/>
+          </a:xfrm>
+          <a:prstGeom prst="rect">
+            <a:avLst/>
+          </a:prstGeom>
+          <a:solidFill>
+            <a:srgbClr val="E89A5C"/>
+          </a:solidFill>
+          <a:ln>
+            <a:noFill/>
+          </a:ln>
+        </p:spPr>
+        <p:style>
+          <a:lnRef idx="1">
+            <a:schemeClr val="accent1"/>
+          </a:lnRef>
+          <a:fillRef idx="3">
+            <a:schemeClr val="accent1"/>
+          </a:fillRef>
+          <a:effectRef idx="2">
+            <a:schemeClr val="accent1"/>
+          </a:effectRef>
+          <a:fontRef idx="minor">
+            <a:schemeClr val="lt1"/>
+          </a:fontRef>
+        </p:style>
+        <p:txBody>
+          <a:bodyPr rtlCol="0" anchor="ctr"/>
+          <a:lstStyle/>
+          <a:p>
+            <a:pPr algn="ctr"/>
+          </a:p>
+        </p:txBody>
+      </p:sp>
+      <p:sp>
+        <p:nvSpPr>
+          <p:cNvPr id="24" name="TextBox 23"/>
+          <p:cNvSpPr txBox="1"/>
+          <p:nvPr/>
+        </p:nvSpPr>
+        <p:spPr>
+          <a:xfrm>
+            <a:off x="612648" y="4718304"/>
+            <a:ext cx="3291840" cy="786384"/>
+          </a:xfrm>
+          <a:prstGeom prst="rect">
+            <a:avLst/>
+          </a:prstGeom>
+          <a:noFill/>
+        </p:spPr>
+        <p:txBody>
+          <a:bodyPr wrap="square">
+            <a:spAutoFit/>
+          </a:bodyPr>
+          <a:lstStyle/>
+          <a:p>
+            <a:pPr algn="l"/>
+            <a:r>
+              <a:rPr sz="1200" b="1">
+                <a:solidFill>
+                  <a:srgbClr val="E89A5C"/>
+                </a:solidFill>
+                <a:latin typeface="Apple SD Gothic Neo"/>
+                <a:ea typeface="Apple SD Gothic Neo"/>
+              </a:rPr>
+              <a:t>진단 · Xu 2021</a:t>
+            </a:r>
+          </a:p>
+          <a:p>
+            <a:pPr algn="l">
+              <a:spcBef>
+                <a:spcPts val="300"/>
+              </a:spcBef>
+              <a:spcAft>
+                <a:spcPts val="0"/>
+              </a:spcAft>
+            </a:pPr>
+            <a:r>
+              <a:rPr sz="1100" b="0">
+                <a:solidFill>
+                  <a:srgbClr val="A0ADBC"/>
+                </a:solidFill>
+                <a:latin typeface="Apple SD Gothic Neo"/>
+                <a:ea typeface="Apple SD Gothic Neo"/>
+              </a:rPr>
+              <a:t>–  ReLU·직선화 — </a:t>
+            </a:r>
+            <a:r>
+              <a:rPr sz="1100" b="1">
+                <a:solidFill>
+                  <a:srgbClr val="A0ADBC"/>
+                </a:solidFill>
+                <a:latin typeface="Apple SD Gothic Neo"/>
+                <a:ea typeface="Apple SD Gothic Neo"/>
+              </a:rPr>
+              <a:t>왜</a:t>
+            </a:r>
+            <a:r>
+              <a:rPr sz="1100" b="0">
+                <a:solidFill>
+                  <a:srgbClr val="A0ADBC"/>
+                </a:solidFill>
+                <a:latin typeface="Apple SD Gothic Neo"/>
+                <a:ea typeface="Apple SD Gothic Neo"/>
+              </a:rPr>
+              <a:t> 밖에서 깨지나</a:t>
+            </a:r>
+          </a:p>
+        </p:txBody>
+      </p:sp>
+      <p:sp>
+        <p:nvSpPr>
+          <p:cNvPr id="25" name="Rounded Rectangle 24">
+            <a:hlinkClick r:id="rId2"/>
+          </p:cNvPr>
+          <p:cNvSpPr/>
+          <p:nvPr/>
+        </p:nvSpPr>
+        <p:spPr>
+          <a:xfrm>
+            <a:off x="3063240" y="5248656"/>
+            <a:ext cx="841248" cy="274320"/>
+          </a:xfrm>
+          <a:prstGeom prst="roundRect">
+            <a:avLst>
+              <a:gd name="adj" fmla="val 18000"/>
+            </a:avLst>
+          </a:prstGeom>
+          <a:solidFill>
+            <a:srgbClr val="18212C"/>
+          </a:solidFill>
+          <a:ln w="12700">
+            <a:solidFill>
+              <a:srgbClr val="E89A5C"/>
+            </a:solidFill>
+          </a:ln>
+        </p:spPr>
+        <p:style>
+          <a:lnRef idx="1">
+            <a:schemeClr val="accent1"/>
+          </a:lnRef>
+          <a:fillRef idx="3">
+            <a:schemeClr val="accent1"/>
+          </a:fillRef>
+          <a:effectRef idx="2">
+            <a:schemeClr val="accent1"/>
+          </a:effectRef>
+          <a:fontRef idx="minor">
+            <a:schemeClr val="lt1"/>
+          </a:fontRef>
+        </p:style>
+        <p:txBody>
+          <a:bodyPr rtlCol="0" anchor="ctr"/>
+          <a:lstStyle/>
+          <a:p>
+            <a:pPr algn="ctr"/>
+            <a:r>
+              <a:rPr sz="1000" b="1">
+                <a:solidFill>
+                  <a:srgbClr val="E89A5C"/>
+                </a:solidFill>
+                <a:latin typeface="Apple SD Gothic Neo"/>
+                <a:ea typeface="Apple SD Gothic Neo"/>
+              </a:rPr>
+              <a:t>PDF</a:t>
+            </a:r>
+          </a:p>
+        </p:txBody>
+      </p:sp>
+      <p:sp>
+        <p:nvSpPr>
+          <p:cNvPr id="26" name="Rounded Rectangle 25"/>
+          <p:cNvSpPr/>
+          <p:nvPr/>
+        </p:nvSpPr>
+        <p:spPr>
+          <a:xfrm>
+            <a:off x="3444845134680" y="4590288"/>
+            <a:ext cx="3639312" cy="987552"/>
+          </a:xfrm>
+          <a:prstGeom prst="roundRect">
+            <a:avLst>
+              <a:gd name="adj" fmla="val 5000"/>
+            </a:avLst>
+          </a:prstGeom>
+          <a:solidFill>
+            <a:srgbClr val="141B24"/>
+          </a:solidFill>
+          <a:ln w="9525">
+            <a:solidFill>
+              <a:srgbClr val="2C3848"/>
+            </a:solidFill>
+          </a:ln>
+        </p:spPr>
+        <p:style>
+          <a:lnRef idx="1">
+            <a:schemeClr val="accent1"/>
+          </a:lnRef>
+          <a:fillRef idx="3">
+            <a:schemeClr val="accent1"/>
+          </a:fillRef>
+          <a:effectRef idx="2">
+            <a:schemeClr val="accent1"/>
+          </a:effectRef>
+          <a:fontRef idx="minor">
+            <a:schemeClr val="lt1"/>
+          </a:fontRef>
+        </p:style>
+        <p:txBody>
+          <a:bodyPr rtlCol="0" anchor="ctr"/>
+          <a:lstStyle/>
+          <a:p>
+            <a:pPr algn="ctr"/>
+          </a:p>
+        </p:txBody>
+      </p:sp>
+      <p:sp>
+        <p:nvSpPr>
+          <p:cNvPr id="27" name="Rectangle 26"/>
+          <p:cNvSpPr/>
+          <p:nvPr/>
+        </p:nvSpPr>
+        <p:spPr>
+          <a:xfrm>
+            <a:off x="3444845134680" y="4590288"/>
+            <a:ext cx="54864" cy="987552"/>
+          </a:xfrm>
+          <a:prstGeom prst="rect">
+            <a:avLst/>
+          </a:prstGeom>
+          <a:solidFill>
+            <a:srgbClr val="3DD6C6"/>
+          </a:solidFill>
+          <a:ln>
+            <a:noFill/>
+          </a:ln>
+        </p:spPr>
+        <p:style>
+          <a:lnRef idx="1">
+            <a:schemeClr val="accent1"/>
+          </a:lnRef>
+          <a:fillRef idx="3">
+            <a:schemeClr val="accent1"/>
+          </a:fillRef>
+          <a:effectRef idx="2">
+            <a:schemeClr val="accent1"/>
+          </a:effectRef>
+          <a:fontRef idx="minor">
+            <a:schemeClr val="lt1"/>
+          </a:fontRef>
+        </p:style>
+        <p:txBody>
+          <a:bodyPr rtlCol="0" anchor="ctr"/>
+          <a:lstStyle/>
+          <a:p>
+            <a:pPr algn="ctr"/>
+          </a:p>
+        </p:txBody>
+      </p:sp>
+      <p:sp>
+        <p:nvSpPr>
+          <p:cNvPr id="28" name="TextBox 27"/>
+          <p:cNvSpPr txBox="1"/>
+          <p:nvPr/>
+        </p:nvSpPr>
+        <p:spPr>
+          <a:xfrm>
+            <a:off x="3444845335848" y="4718304"/>
+            <a:ext cx="3291840" cy="786384"/>
+          </a:xfrm>
+          <a:prstGeom prst="rect">
+            <a:avLst/>
+          </a:prstGeom>
+          <a:noFill/>
+        </p:spPr>
+        <p:txBody>
+          <a:bodyPr wrap="square">
+            <a:spAutoFit/>
+          </a:bodyPr>
+          <a:lstStyle/>
+          <a:p>
+            <a:pPr algn="l"/>
+            <a:r>
+              <a:rPr sz="1200" b="1">
+                <a:solidFill>
+                  <a:srgbClr val="3DD6C6"/>
+                </a:solidFill>
+                <a:latin typeface="Apple SD Gothic Neo"/>
+                <a:ea typeface="Apple SD Gothic Neo"/>
+              </a:rPr>
+              <a:t>처방 · Runje 2023</a:t>
+            </a:r>
+          </a:p>
+          <a:p>
+            <a:pPr algn="l">
+              <a:spcBef>
+                <a:spcPts val="300"/>
+              </a:spcBef>
+              <a:spcAft>
+                <a:spcPts val="0"/>
+              </a:spcAft>
+            </a:pPr>
+            <a:r>
+              <a:rPr sz="1100" b="0">
+                <a:solidFill>
+                  <a:srgbClr val="A0ADBC"/>
+                </a:solidFill>
+                <a:latin typeface="Apple SD Gothic Neo"/>
+                <a:ea typeface="Apple SD Gothic Neo"/>
+              </a:rPr>
+              <a:t>–  CMNN — </a:t>
+            </a:r>
+            <a:r>
+              <a:rPr sz="1100" b="1">
+                <a:solidFill>
+                  <a:srgbClr val="A0ADBC"/>
+                </a:solidFill>
+                <a:latin typeface="Apple SD Gothic Neo"/>
+                <a:ea typeface="Apple SD Gothic Neo"/>
+              </a:rPr>
+              <a:t>방향</a:t>
+            </a:r>
+            <a:r>
+              <a:rPr sz="1100" b="0">
+                <a:solidFill>
+                  <a:srgbClr val="A0ADBC"/>
+                </a:solidFill>
+                <a:latin typeface="Apple SD Gothic Neo"/>
+                <a:ea typeface="Apple SD Gothic Neo"/>
+              </a:rPr>
+              <a:t> 가정을 구조에</a:t>
+            </a:r>
+          </a:p>
+        </p:txBody>
+      </p:sp>
+      <p:sp>
+        <p:nvSpPr>
+          <p:cNvPr id="29" name="Rounded Rectangle 28">
+            <a:hlinkClick r:id="rId3"/>
+          </p:cNvPr>
+          <p:cNvSpPr/>
+          <p:nvPr/>
+        </p:nvSpPr>
+        <p:spPr>
+          <a:xfrm>
+            <a:off x="3444847786440" y="5248656"/>
+            <a:ext cx="841248" cy="274320"/>
+          </a:xfrm>
+          <a:prstGeom prst="roundRect">
+            <a:avLst>
+              <a:gd name="adj" fmla="val 18000"/>
+            </a:avLst>
+          </a:prstGeom>
+          <a:solidFill>
+            <a:srgbClr val="18212C"/>
+          </a:solidFill>
+          <a:ln w="12700">
+            <a:solidFill>
+              <a:srgbClr val="E89A5C"/>
+            </a:solidFill>
+          </a:ln>
+        </p:spPr>
+        <p:style>
+          <a:lnRef idx="1">
+            <a:schemeClr val="accent1"/>
+          </a:lnRef>
+          <a:fillRef idx="3">
+            <a:schemeClr val="accent1"/>
+          </a:fillRef>
+          <a:effectRef idx="2">
+            <a:schemeClr val="accent1"/>
+          </a:effectRef>
+          <a:fontRef idx="minor">
+            <a:schemeClr val="lt1"/>
+          </a:fontRef>
+        </p:style>
+        <p:txBody>
+          <a:bodyPr rtlCol="0" anchor="ctr"/>
+          <a:lstStyle/>
+          <a:p>
+            <a:pPr algn="ctr"/>
+            <a:r>
+              <a:rPr sz="1000" b="1">
+                <a:solidFill>
+                  <a:srgbClr val="E89A5C"/>
+                </a:solidFill>
+                <a:latin typeface="Apple SD Gothic Neo"/>
+                <a:ea typeface="Apple SD Gothic Neo"/>
+              </a:rPr>
+              <a:t>PDF</a:t>
+            </a:r>
+          </a:p>
+        </p:txBody>
+      </p:sp>
+      <p:sp>
+        <p:nvSpPr>
+          <p:cNvPr id="30" name="Rounded Rectangle 29"/>
+          <p:cNvSpPr/>
+          <p:nvPr/>
+        </p:nvSpPr>
+        <p:spPr>
+          <a:xfrm>
+            <a:off x="6889689857880" y="4590288"/>
+            <a:ext cx="3639312" cy="987552"/>
+          </a:xfrm>
+          <a:prstGeom prst="roundRect">
+            <a:avLst>
+              <a:gd name="adj" fmla="val 5000"/>
+            </a:avLst>
+          </a:prstGeom>
+          <a:solidFill>
+            <a:srgbClr val="141B24"/>
+          </a:solidFill>
+          <a:ln w="9525">
+            <a:solidFill>
+              <a:srgbClr val="2C3848"/>
+            </a:solidFill>
+          </a:ln>
+        </p:spPr>
+        <p:style>
+          <a:lnRef idx="1">
+            <a:schemeClr val="accent1"/>
+          </a:lnRef>
+          <a:fillRef idx="3">
+            <a:schemeClr val="accent1"/>
+          </a:fillRef>
+          <a:effectRef idx="2">
+            <a:schemeClr val="accent1"/>
+          </a:effectRef>
+          <a:fontRef idx="minor">
+            <a:schemeClr val="lt1"/>
+          </a:fontRef>
+        </p:style>
+        <p:txBody>
+          <a:bodyPr rtlCol="0" anchor="ctr"/>
+          <a:lstStyle/>
+          <a:p>
+            <a:pPr algn="ctr"/>
+          </a:p>
+        </p:txBody>
+      </p:sp>
+      <p:sp>
+        <p:nvSpPr>
+          <p:cNvPr id="31" name="Rectangle 30"/>
+          <p:cNvSpPr/>
+          <p:nvPr/>
+        </p:nvSpPr>
+        <p:spPr>
+          <a:xfrm>
+            <a:off x="6889689857880" y="4590288"/>
+            <a:ext cx="54864" cy="987552"/>
+          </a:xfrm>
+          <a:prstGeom prst="rect">
+            <a:avLst/>
+          </a:prstGeom>
+          <a:solidFill>
+            <a:srgbClr val="3DD6C6"/>
+          </a:solidFill>
+          <a:ln>
+            <a:noFill/>
+          </a:ln>
+        </p:spPr>
+        <p:style>
+          <a:lnRef idx="1">
+            <a:schemeClr val="accent1"/>
+          </a:lnRef>
+          <a:fillRef idx="3">
+            <a:schemeClr val="accent1"/>
+          </a:fillRef>
+          <a:effectRef idx="2">
+            <a:schemeClr val="accent1"/>
+          </a:effectRef>
+          <a:fontRef idx="minor">
+            <a:schemeClr val="lt1"/>
+          </a:fontRef>
+        </p:style>
+        <p:txBody>
+          <a:bodyPr rtlCol="0" anchor="ctr"/>
+          <a:lstStyle/>
+          <a:p>
+            <a:pPr algn="ctr"/>
+          </a:p>
+        </p:txBody>
+      </p:sp>
+      <p:sp>
+        <p:nvSpPr>
+          <p:cNvPr id="32" name="TextBox 31"/>
+          <p:cNvSpPr txBox="1"/>
+          <p:nvPr/>
+        </p:nvSpPr>
+        <p:spPr>
+          <a:xfrm>
+            <a:off x="6889690059048" y="4718304"/>
+            <a:ext cx="3291840" cy="786384"/>
+          </a:xfrm>
+          <a:prstGeom prst="rect">
+            <a:avLst/>
+          </a:prstGeom>
+          <a:noFill/>
+        </p:spPr>
+        <p:txBody>
+          <a:bodyPr wrap="square">
+            <a:spAutoFit/>
+          </a:bodyPr>
+          <a:lstStyle/>
+          <a:p>
+            <a:pPr algn="l"/>
+            <a:r>
+              <a:rPr sz="1200" b="1">
+                <a:solidFill>
+                  <a:srgbClr val="3DD6C6"/>
+                </a:solidFill>
+                <a:latin typeface="Apple SD Gothic Neo"/>
+                <a:ea typeface="Apple SD Gothic Neo"/>
+              </a:rPr>
+              <a:t>검증 · Bartley 2019</a:t>
+            </a:r>
+          </a:p>
+          <a:p>
+            <a:pPr algn="l">
+              <a:spcBef>
+                <a:spcPts val="300"/>
+              </a:spcBef>
+              <a:spcAft>
+                <a:spcPts val="0"/>
+              </a:spcAft>
+            </a:pPr>
+            <a:r>
+              <a:rPr sz="1100" b="0">
+                <a:solidFill>
+                  <a:srgbClr val="A0ADBC"/>
+                </a:solidFill>
+                <a:latin typeface="Apple SD Gothic Neo"/>
+                <a:ea typeface="Apple SD Gothic Neo"/>
+              </a:rPr>
+              <a:t>–  hull·고차원 — </a:t>
+            </a:r>
+            <a:r>
+              <a:rPr sz="1100" b="1">
+                <a:solidFill>
+                  <a:srgbClr val="A0ADBC"/>
+                </a:solidFill>
+                <a:latin typeface="Apple SD Gothic Neo"/>
+                <a:ea typeface="Apple SD Gothic Neo"/>
+              </a:rPr>
+              <a:t>밖</a:t>
+            </a:r>
+            <a:r>
+              <a:rPr sz="1100" b="0">
+                <a:solidFill>
+                  <a:srgbClr val="A0ADBC"/>
+                </a:solidFill>
+                <a:latin typeface="Apple SD Gothic Neo"/>
+                <a:ea typeface="Apple SD Gothic Neo"/>
+              </a:rPr>
+              <a:t>인지 판정</a:t>
+            </a:r>
+          </a:p>
+        </p:txBody>
+      </p:sp>
+      <p:sp>
+        <p:nvSpPr>
+          <p:cNvPr id="33" name="Rounded Rectangle 32">
+            <a:hlinkClick r:id="rId4"/>
+          </p:cNvPr>
+          <p:cNvSpPr/>
+          <p:nvPr/>
+        </p:nvSpPr>
+        <p:spPr>
+          <a:xfrm>
+            <a:off x="6889692509640" y="5248656"/>
+            <a:ext cx="841248" cy="274320"/>
+          </a:xfrm>
+          <a:prstGeom prst="roundRect">
+            <a:avLst>
+              <a:gd name="adj" fmla="val 18000"/>
+            </a:avLst>
+          </a:prstGeom>
+          <a:solidFill>
+            <a:srgbClr val="18212C"/>
+          </a:solidFill>
+          <a:ln w="12700">
+            <a:solidFill>
+              <a:srgbClr val="E89A5C"/>
+            </a:solidFill>
+          </a:ln>
+        </p:spPr>
+        <p:style>
+          <a:lnRef idx="1">
+            <a:schemeClr val="accent1"/>
+          </a:lnRef>
+          <a:fillRef idx="3">
+            <a:schemeClr val="accent1"/>
+          </a:fillRef>
+          <a:effectRef idx="2">
+            <a:schemeClr val="accent1"/>
+          </a:effectRef>
+          <a:fontRef idx="minor">
+            <a:schemeClr val="lt1"/>
+          </a:fontRef>
+        </p:style>
+        <p:txBody>
+          <a:bodyPr rtlCol="0" anchor="ctr"/>
+          <a:lstStyle/>
+          <a:p>
+            <a:pPr algn="ctr"/>
+            <a:r>
+              <a:rPr sz="1000" b="1">
+                <a:solidFill>
+                  <a:srgbClr val="E89A5C"/>
+                </a:solidFill>
+                <a:latin typeface="Apple SD Gothic Neo"/>
+                <a:ea typeface="Apple SD Gothic Neo"/>
+              </a:rPr>
+              <a:t>PDF</a:t>
+            </a:r>
+          </a:p>
+        </p:txBody>
+      </p:sp>
+      <p:sp>
+        <p:nvSpPr>
+          <p:cNvPr id="34" name="TextBox 33"/>
+          <p:cNvSpPr txBox="1"/>
+          <p:nvPr/>
+        </p:nvSpPr>
+        <p:spPr>
+          <a:xfrm>
+            <a:off x="457200" y="6473952"/>
+            <a:ext cx="9144000" cy="292608"/>
+          </a:xfrm>
+          <a:prstGeom prst="rect">
+            <a:avLst/>
+          </a:prstGeom>
+          <a:noFill/>
+        </p:spPr>
+        <p:txBody>
+          <a:bodyPr wrap="none">
+            <a:spAutoFit/>
+          </a:bodyPr>
+          <a:lstStyle/>
+          <a:p>
+            <a:r>
+              <a:rPr sz="900" b="0">
+                <a:solidFill>
+                  <a:srgbClr val="6E7C8C"/>
+                </a:solidFill>
+                <a:latin typeface="Apple SD Gothic Neo"/>
+                <a:ea typeface="Apple SD Gothic Neo"/>
+              </a:rPr>
+              <a:t>Extrapolation Seminar  ·  Kookmin Univ. IE Lab  ·  2026  </a:t>
+            </a:r>
+          </a:p>
+        </p:txBody>
+      </p:sp>
+      <p:sp>
+        <p:nvSpPr>
+          <p:cNvPr id="35" name="TextBox 34"/>
+          <p:cNvSpPr txBox="1"/>
+          <p:nvPr/>
+        </p:nvSpPr>
+        <p:spPr>
+          <a:xfrm>
+            <a:off x="10607040" y="6473952"/>
+            <a:ext cx="1280160" cy="292608"/>
+          </a:xfrm>
+          <a:prstGeom prst="rect">
+            <a:avLst/>
+          </a:prstGeom>
+          <a:noFill/>
+        </p:spPr>
+        <p:txBody>
+          <a:bodyPr wrap="none">
+            <a:spAutoFit/>
+          </a:bodyPr>
+          <a:lstStyle/>
+          <a:p>
+            <a:pPr algn="r"/>
+            <a:r>
+              <a:rPr sz="900" b="0">
+                <a:solidFill>
+                  <a:srgbClr val="6E7C8C"/>
+                </a:solidFill>
+                <a:latin typeface="Apple SD Gothic Neo"/>
+                <a:ea typeface="Apple SD Gothic Neo"/>
+              </a:rPr>
+              <a:t>26 / 27</a:t>
+            </a:r>
+          </a:p>
+        </p:txBody>
+      </p:sp>
+      <p:sp>
+        <p:nvSpPr>
+          <p:cNvPr id="36" name="Rounded Rectangle 35"/>
+          <p:cNvSpPr/>
+          <p:nvPr/>
+        </p:nvSpPr>
+        <p:spPr>
+          <a:xfrm>
+            <a:off x="365760" y="5742432"/>
+            <a:ext cx="11430000" cy="512064"/>
           </a:xfrm>
           <a:prstGeom prst="roundRect">
             <a:avLst>
@@ -28155,633 +28959,13 @@
       </p:sp>
       <p:sp>
         <p:nvSpPr>
-          <p:cNvPr id="25" name="TextBox 24"/>
-          <p:cNvSpPr txBox="1"/>
-          <p:nvPr/>
-        </p:nvSpPr>
-        <p:spPr>
-          <a:xfrm>
-            <a:off x="594360" y="3383280"/>
-            <a:ext cx="10972800" cy="384048"/>
-          </a:xfrm>
-          <a:prstGeom prst="rect">
-            <a:avLst/>
-          </a:prstGeom>
-          <a:noFill/>
-        </p:spPr>
-        <p:txBody>
-          <a:bodyPr wrap="square">
-            <a:spAutoFit/>
-          </a:bodyPr>
-          <a:lstStyle/>
-          <a:p>
-            <a:pPr algn="ctr"/>
-            <a:r>
-              <a:rPr sz="1500" b="1">
-                <a:solidFill>
-                  <a:srgbClr val="ECF1F7"/>
-                </a:solidFill>
-                <a:latin typeface="Apple SD Gothic Neo"/>
-                <a:ea typeface="Apple SD Gothic Neo"/>
-              </a:rPr>
-              <a:t>“외삽 되나?”  →  “</a:t>
-            </a:r>
-            <a:r>
-              <a:rPr sz="1500" b="1">
-                <a:solidFill>
-                  <a:srgbClr val="ECF1F7"/>
-                </a:solidFill>
-                <a:latin typeface="Apple SD Gothic Neo"/>
-                <a:ea typeface="Apple SD Gothic Neo"/>
-              </a:rPr>
-              <a:t>가정</a:t>
-            </a:r>
-            <a:r>
-              <a:rPr sz="1500" b="1">
-                <a:solidFill>
-                  <a:srgbClr val="ECF1F7"/>
-                </a:solidFill>
-                <a:latin typeface="Apple SD Gothic Neo"/>
-                <a:ea typeface="Apple SD Gothic Neo"/>
-              </a:rPr>
-              <a:t>이 맞고, </a:t>
-            </a:r>
-            <a:r>
-              <a:rPr sz="1500" b="1">
-                <a:solidFill>
-                  <a:srgbClr val="ECF1F7"/>
-                </a:solidFill>
-                <a:latin typeface="Apple SD Gothic Neo"/>
-                <a:ea typeface="Apple SD Gothic Neo"/>
-              </a:rPr>
-              <a:t>밖에서 시험</a:t>
-            </a:r>
-            <a:r>
-              <a:rPr sz="1500" b="1">
-                <a:solidFill>
-                  <a:srgbClr val="ECF1F7"/>
-                </a:solidFill>
-                <a:latin typeface="Apple SD Gothic Neo"/>
-                <a:ea typeface="Apple SD Gothic Neo"/>
-              </a:rPr>
-              <a:t>했나?”</a:t>
-            </a:r>
-          </a:p>
-        </p:txBody>
-      </p:sp>
-      <p:sp>
-        <p:nvSpPr>
-          <p:cNvPr id="26" name="Rounded Rectangle 25"/>
+          <p:cNvPr id="37" name="Rectangle 36"/>
           <p:cNvSpPr/>
           <p:nvPr/>
         </p:nvSpPr>
         <p:spPr>
           <a:xfrm>
-            <a:off x="411480" y="4005072"/>
-            <a:ext cx="3246120" cy="438912"/>
-          </a:xfrm>
-          <a:prstGeom prst="roundRect">
-            <a:avLst>
-              <a:gd name="adj" fmla="val 5000"/>
-            </a:avLst>
-          </a:prstGeom>
-          <a:solidFill>
-            <a:srgbClr val="141B24"/>
-          </a:solidFill>
-          <a:ln w="9525">
-            <a:solidFill>
-              <a:srgbClr val="E89A5C"/>
-            </a:solidFill>
-          </a:ln>
-        </p:spPr>
-        <p:style>
-          <a:lnRef idx="1">
-            <a:schemeClr val="accent1"/>
-          </a:lnRef>
-          <a:fillRef idx="3">
-            <a:schemeClr val="accent1"/>
-          </a:fillRef>
-          <a:effectRef idx="2">
-            <a:schemeClr val="accent1"/>
-          </a:effectRef>
-          <a:fontRef idx="minor">
-            <a:schemeClr val="lt1"/>
-          </a:fontRef>
-        </p:style>
-        <p:txBody>
-          <a:bodyPr rtlCol="0" anchor="ctr"/>
-          <a:lstStyle/>
-          <a:p>
-            <a:pPr algn="ctr"/>
-          </a:p>
-        </p:txBody>
-      </p:sp>
-      <p:sp>
-        <p:nvSpPr>
-          <p:cNvPr id="27" name="TextBox 26"/>
-          <p:cNvSpPr txBox="1"/>
-          <p:nvPr/>
-        </p:nvSpPr>
-        <p:spPr>
-          <a:xfrm>
-            <a:off x="576072" y="4096512"/>
-            <a:ext cx="2011680" cy="274320"/>
-          </a:xfrm>
-          <a:prstGeom prst="rect">
-            <a:avLst/>
-          </a:prstGeom>
-          <a:noFill/>
-        </p:spPr>
-        <p:txBody>
-          <a:bodyPr wrap="square">
-            <a:spAutoFit/>
-          </a:bodyPr>
-          <a:lstStyle/>
-          <a:p>
-            <a:pPr algn="l"/>
-            <a:r>
-              <a:rPr sz="1100" b="1">
-                <a:solidFill>
-                  <a:srgbClr val="ECF1F7"/>
-                </a:solidFill>
-                <a:latin typeface="Apple SD Gothic Neo"/>
-                <a:ea typeface="Apple SD Gothic Neo"/>
-              </a:rPr>
-              <a:t>진단 · Xu 2021</a:t>
-            </a:r>
-          </a:p>
-        </p:txBody>
-      </p:sp>
-      <p:sp>
-        <p:nvSpPr>
-          <p:cNvPr id="28" name="Rounded Rectangle 27">
-            <a:hlinkClick r:id="rId2"/>
-          </p:cNvPr>
-          <p:cNvSpPr/>
-          <p:nvPr/>
-        </p:nvSpPr>
-        <p:spPr>
-          <a:xfrm>
-            <a:off x="2651760" y="4059936"/>
-            <a:ext cx="868680" cy="329184"/>
-          </a:xfrm>
-          <a:prstGeom prst="roundRect">
-            <a:avLst>
-              <a:gd name="adj" fmla="val 18000"/>
-            </a:avLst>
-          </a:prstGeom>
-          <a:solidFill>
-            <a:srgbClr val="18212C"/>
-          </a:solidFill>
-          <a:ln w="12700">
-            <a:solidFill>
-              <a:srgbClr val="E89A5C"/>
-            </a:solidFill>
-          </a:ln>
-        </p:spPr>
-        <p:style>
-          <a:lnRef idx="1">
-            <a:schemeClr val="accent1"/>
-          </a:lnRef>
-          <a:fillRef idx="3">
-            <a:schemeClr val="accent1"/>
-          </a:fillRef>
-          <a:effectRef idx="2">
-            <a:schemeClr val="accent1"/>
-          </a:effectRef>
-          <a:fontRef idx="minor">
-            <a:schemeClr val="lt1"/>
-          </a:fontRef>
-        </p:style>
-        <p:txBody>
-          <a:bodyPr rtlCol="0" anchor="ctr"/>
-          <a:lstStyle/>
-          <a:p>
-            <a:pPr algn="ctr"/>
-            <a:r>
-              <a:rPr sz="1000" b="1">
-                <a:solidFill>
-                  <a:srgbClr val="E89A5C"/>
-                </a:solidFill>
-                <a:latin typeface="Apple SD Gothic Neo"/>
-                <a:ea typeface="Apple SD Gothic Neo"/>
-              </a:rPr>
-              <a:t>PDF</a:t>
-            </a:r>
-          </a:p>
-        </p:txBody>
-      </p:sp>
-      <p:sp>
-        <p:nvSpPr>
-          <p:cNvPr id="29" name="Rounded Rectangle 28"/>
-          <p:cNvSpPr/>
-          <p:nvPr/>
-        </p:nvSpPr>
-        <p:spPr>
-          <a:xfrm>
-            <a:off x="4251960" y="4005072"/>
-            <a:ext cx="3246120" cy="438912"/>
-          </a:xfrm>
-          <a:prstGeom prst="roundRect">
-            <a:avLst>
-              <a:gd name="adj" fmla="val 5000"/>
-            </a:avLst>
-          </a:prstGeom>
-          <a:solidFill>
-            <a:srgbClr val="141B24"/>
-          </a:solidFill>
-          <a:ln w="9525">
-            <a:solidFill>
-              <a:srgbClr val="3DD6C6"/>
-            </a:solidFill>
-          </a:ln>
-        </p:spPr>
-        <p:style>
-          <a:lnRef idx="1">
-            <a:schemeClr val="accent1"/>
-          </a:lnRef>
-          <a:fillRef idx="3">
-            <a:schemeClr val="accent1"/>
-          </a:fillRef>
-          <a:effectRef idx="2">
-            <a:schemeClr val="accent1"/>
-          </a:effectRef>
-          <a:fontRef idx="minor">
-            <a:schemeClr val="lt1"/>
-          </a:fontRef>
-        </p:style>
-        <p:txBody>
-          <a:bodyPr rtlCol="0" anchor="ctr"/>
-          <a:lstStyle/>
-          <a:p>
-            <a:pPr algn="ctr"/>
-          </a:p>
-        </p:txBody>
-      </p:sp>
-      <p:sp>
-        <p:nvSpPr>
-          <p:cNvPr id="30" name="TextBox 29"/>
-          <p:cNvSpPr txBox="1"/>
-          <p:nvPr/>
-        </p:nvSpPr>
-        <p:spPr>
-          <a:xfrm>
-            <a:off x="4416552" y="4096512"/>
-            <a:ext cx="2011680" cy="274320"/>
-          </a:xfrm>
-          <a:prstGeom prst="rect">
-            <a:avLst/>
-          </a:prstGeom>
-          <a:noFill/>
-        </p:spPr>
-        <p:txBody>
-          <a:bodyPr wrap="square">
-            <a:spAutoFit/>
-          </a:bodyPr>
-          <a:lstStyle/>
-          <a:p>
-            <a:pPr algn="l"/>
-            <a:r>
-              <a:rPr sz="1100" b="1">
-                <a:solidFill>
-                  <a:srgbClr val="ECF1F7"/>
-                </a:solidFill>
-                <a:latin typeface="Apple SD Gothic Neo"/>
-                <a:ea typeface="Apple SD Gothic Neo"/>
-              </a:rPr>
-              <a:t>처방 · Runje 2023</a:t>
-            </a:r>
-          </a:p>
-        </p:txBody>
-      </p:sp>
-      <p:sp>
-        <p:nvSpPr>
-          <p:cNvPr id="31" name="Rounded Rectangle 30">
-            <a:hlinkClick r:id="rId3"/>
-          </p:cNvPr>
-          <p:cNvSpPr/>
-          <p:nvPr/>
-        </p:nvSpPr>
-        <p:spPr>
-          <a:xfrm>
-            <a:off x="6492240" y="4059936"/>
-            <a:ext cx="868680" cy="329184"/>
-          </a:xfrm>
-          <a:prstGeom prst="roundRect">
-            <a:avLst>
-              <a:gd name="adj" fmla="val 18000"/>
-            </a:avLst>
-          </a:prstGeom>
-          <a:solidFill>
-            <a:srgbClr val="18212C"/>
-          </a:solidFill>
-          <a:ln w="12700">
-            <a:solidFill>
-              <a:srgbClr val="E89A5C"/>
-            </a:solidFill>
-          </a:ln>
-        </p:spPr>
-        <p:style>
-          <a:lnRef idx="1">
-            <a:schemeClr val="accent1"/>
-          </a:lnRef>
-          <a:fillRef idx="3">
-            <a:schemeClr val="accent1"/>
-          </a:fillRef>
-          <a:effectRef idx="2">
-            <a:schemeClr val="accent1"/>
-          </a:effectRef>
-          <a:fontRef idx="minor">
-            <a:schemeClr val="lt1"/>
-          </a:fontRef>
-        </p:style>
-        <p:txBody>
-          <a:bodyPr rtlCol="0" anchor="ctr"/>
-          <a:lstStyle/>
-          <a:p>
-            <a:pPr algn="ctr"/>
-            <a:r>
-              <a:rPr sz="1000" b="1">
-                <a:solidFill>
-                  <a:srgbClr val="E89A5C"/>
-                </a:solidFill>
-                <a:latin typeface="Apple SD Gothic Neo"/>
-                <a:ea typeface="Apple SD Gothic Neo"/>
-              </a:rPr>
-              <a:t>PDF</a:t>
-            </a:r>
-          </a:p>
-        </p:txBody>
-      </p:sp>
-      <p:sp>
-        <p:nvSpPr>
-          <p:cNvPr id="32" name="Rounded Rectangle 31"/>
-          <p:cNvSpPr/>
-          <p:nvPr/>
-        </p:nvSpPr>
-        <p:spPr>
-          <a:xfrm>
-            <a:off x="8092440" y="4005072"/>
-            <a:ext cx="3246120" cy="438912"/>
-          </a:xfrm>
-          <a:prstGeom prst="roundRect">
-            <a:avLst>
-              <a:gd name="adj" fmla="val 5000"/>
-            </a:avLst>
-          </a:prstGeom>
-          <a:solidFill>
-            <a:srgbClr val="141B24"/>
-          </a:solidFill>
-          <a:ln w="9525">
-            <a:solidFill>
-              <a:srgbClr val="3DD6C6"/>
-            </a:solidFill>
-          </a:ln>
-        </p:spPr>
-        <p:style>
-          <a:lnRef idx="1">
-            <a:schemeClr val="accent1"/>
-          </a:lnRef>
-          <a:fillRef idx="3">
-            <a:schemeClr val="accent1"/>
-          </a:fillRef>
-          <a:effectRef idx="2">
-            <a:schemeClr val="accent1"/>
-          </a:effectRef>
-          <a:fontRef idx="minor">
-            <a:schemeClr val="lt1"/>
-          </a:fontRef>
-        </p:style>
-        <p:txBody>
-          <a:bodyPr rtlCol="0" anchor="ctr"/>
-          <a:lstStyle/>
-          <a:p>
-            <a:pPr algn="ctr"/>
-          </a:p>
-        </p:txBody>
-      </p:sp>
-      <p:sp>
-        <p:nvSpPr>
-          <p:cNvPr id="33" name="TextBox 32"/>
-          <p:cNvSpPr txBox="1"/>
-          <p:nvPr/>
-        </p:nvSpPr>
-        <p:spPr>
-          <a:xfrm>
-            <a:off x="8257032" y="4096512"/>
-            <a:ext cx="2011680" cy="274320"/>
-          </a:xfrm>
-          <a:prstGeom prst="rect">
-            <a:avLst/>
-          </a:prstGeom>
-          <a:noFill/>
-        </p:spPr>
-        <p:txBody>
-          <a:bodyPr wrap="square">
-            <a:spAutoFit/>
-          </a:bodyPr>
-          <a:lstStyle/>
-          <a:p>
-            <a:pPr algn="l"/>
-            <a:r>
-              <a:rPr sz="1100" b="1">
-                <a:solidFill>
-                  <a:srgbClr val="ECF1F7"/>
-                </a:solidFill>
-                <a:latin typeface="Apple SD Gothic Neo"/>
-                <a:ea typeface="Apple SD Gothic Neo"/>
-              </a:rPr>
-              <a:t>검증 · Bartley 2019</a:t>
-            </a:r>
-          </a:p>
-        </p:txBody>
-      </p:sp>
-      <p:sp>
-        <p:nvSpPr>
-          <p:cNvPr id="34" name="Rounded Rectangle 33">
-            <a:hlinkClick r:id="rId4"/>
-          </p:cNvPr>
-          <p:cNvSpPr/>
-          <p:nvPr/>
-        </p:nvSpPr>
-        <p:spPr>
-          <a:xfrm>
-            <a:off x="10332720" y="4059936"/>
-            <a:ext cx="868680" cy="329184"/>
-          </a:xfrm>
-          <a:prstGeom prst="roundRect">
-            <a:avLst>
-              <a:gd name="adj" fmla="val 18000"/>
-            </a:avLst>
-          </a:prstGeom>
-          <a:solidFill>
-            <a:srgbClr val="18212C"/>
-          </a:solidFill>
-          <a:ln w="12700">
-            <a:solidFill>
-              <a:srgbClr val="E89A5C"/>
-            </a:solidFill>
-          </a:ln>
-        </p:spPr>
-        <p:style>
-          <a:lnRef idx="1">
-            <a:schemeClr val="accent1"/>
-          </a:lnRef>
-          <a:fillRef idx="3">
-            <a:schemeClr val="accent1"/>
-          </a:fillRef>
-          <a:effectRef idx="2">
-            <a:schemeClr val="accent1"/>
-          </a:effectRef>
-          <a:fontRef idx="minor">
-            <a:schemeClr val="lt1"/>
-          </a:fontRef>
-        </p:style>
-        <p:txBody>
-          <a:bodyPr rtlCol="0" anchor="ctr"/>
-          <a:lstStyle/>
-          <a:p>
-            <a:pPr algn="ctr"/>
-            <a:r>
-              <a:rPr sz="1000" b="1">
-                <a:solidFill>
-                  <a:srgbClr val="E89A5C"/>
-                </a:solidFill>
-                <a:latin typeface="Apple SD Gothic Neo"/>
-                <a:ea typeface="Apple SD Gothic Neo"/>
-              </a:rPr>
-              <a:t>PDF</a:t>
-            </a:r>
-          </a:p>
-        </p:txBody>
-      </p:sp>
-      <p:sp>
-        <p:nvSpPr>
-          <p:cNvPr id="35" name="TextBox 34"/>
-          <p:cNvSpPr txBox="1"/>
-          <p:nvPr/>
-        </p:nvSpPr>
-        <p:spPr>
-          <a:xfrm>
-            <a:off x="457200" y="6473952"/>
-            <a:ext cx="9144000" cy="292608"/>
-          </a:xfrm>
-          <a:prstGeom prst="rect">
-            <a:avLst/>
-          </a:prstGeom>
-          <a:noFill/>
-        </p:spPr>
-        <p:txBody>
-          <a:bodyPr wrap="none">
-            <a:spAutoFit/>
-          </a:bodyPr>
-          <a:lstStyle/>
-          <a:p>
-            <a:r>
-              <a:rPr sz="900" b="0">
-                <a:solidFill>
-                  <a:srgbClr val="6E7C8C"/>
-                </a:solidFill>
-                <a:latin typeface="Apple SD Gothic Neo"/>
-                <a:ea typeface="Apple SD Gothic Neo"/>
-              </a:rPr>
-              <a:t>Extrapolation Seminar  ·  Kookmin Univ. IE Lab  ·  2026  </a:t>
-            </a:r>
-          </a:p>
-        </p:txBody>
-      </p:sp>
-      <p:sp>
-        <p:nvSpPr>
-          <p:cNvPr id="36" name="TextBox 35"/>
-          <p:cNvSpPr txBox="1"/>
-          <p:nvPr/>
-        </p:nvSpPr>
-        <p:spPr>
-          <a:xfrm>
-            <a:off x="10607040" y="6473952"/>
-            <a:ext cx="1280160" cy="292608"/>
-          </a:xfrm>
-          <a:prstGeom prst="rect">
-            <a:avLst/>
-          </a:prstGeom>
-          <a:noFill/>
-        </p:spPr>
-        <p:txBody>
-          <a:bodyPr wrap="none">
-            <a:spAutoFit/>
-          </a:bodyPr>
-          <a:lstStyle/>
-          <a:p>
-            <a:pPr algn="r"/>
-            <a:r>
-              <a:rPr sz="900" b="0">
-                <a:solidFill>
-                  <a:srgbClr val="6E7C8C"/>
-                </a:solidFill>
-                <a:latin typeface="Apple SD Gothic Neo"/>
-                <a:ea typeface="Apple SD Gothic Neo"/>
-              </a:rPr>
-              <a:t>26 / 27</a:t>
-            </a:r>
-          </a:p>
-        </p:txBody>
-      </p:sp>
-      <p:sp>
-        <p:nvSpPr>
-          <p:cNvPr id="37" name="Rounded Rectangle 36"/>
-          <p:cNvSpPr/>
-          <p:nvPr/>
-        </p:nvSpPr>
-        <p:spPr>
-          <a:xfrm>
-            <a:off x="365760" y="4617720"/>
-            <a:ext cx="11430000" cy="512064"/>
-          </a:xfrm>
-          <a:prstGeom prst="roundRect">
-            <a:avLst>
-              <a:gd name="adj" fmla="val 4000"/>
-            </a:avLst>
-          </a:prstGeom>
-          <a:solidFill>
-            <a:srgbClr val="243A42"/>
-          </a:solidFill>
-          <a:ln w="9525">
-            <a:solidFill>
-              <a:srgbClr val="2C3848"/>
-            </a:solidFill>
-          </a:ln>
-        </p:spPr>
-        <p:style>
-          <a:lnRef idx="1">
-            <a:schemeClr val="accent1"/>
-          </a:lnRef>
-          <a:fillRef idx="3">
-            <a:schemeClr val="accent1"/>
-          </a:fillRef>
-          <a:effectRef idx="2">
-            <a:schemeClr val="accent1"/>
-          </a:effectRef>
-          <a:fontRef idx="minor">
-            <a:schemeClr val="lt1"/>
-          </a:fontRef>
-        </p:style>
-        <p:txBody>
-          <a:bodyPr rtlCol="0" anchor="ctr"/>
-          <a:lstStyle/>
-          <a:p>
-            <a:pPr algn="ctr"/>
-          </a:p>
-        </p:txBody>
-      </p:sp>
-      <p:sp>
-        <p:nvSpPr>
-          <p:cNvPr id="38" name="Rectangle 37"/>
-          <p:cNvSpPr/>
-          <p:nvPr/>
-        </p:nvSpPr>
-        <p:spPr>
-          <a:xfrm>
-            <a:off x="365760" y="4617720"/>
+            <a:off x="365760" y="5742432"/>
             <a:ext cx="64008" cy="512064"/>
           </a:xfrm>
           <a:prstGeom prst="rect">
@@ -28818,13 +29002,13 @@
       </p:sp>
       <p:sp>
         <p:nvSpPr>
-          <p:cNvPr id="39" name="TextBox 38"/>
+          <p:cNvPr id="38" name="TextBox 37"/>
           <p:cNvSpPr txBox="1"/>
           <p:nvPr/>
         </p:nvSpPr>
         <p:spPr>
           <a:xfrm>
-            <a:off x="566928" y="4663440"/>
+            <a:off x="566928" y="5788152"/>
             <a:ext cx="11064240" cy="438912"/>
           </a:xfrm>
           <a:prstGeom prst="rect">
@@ -28847,7 +29031,7 @@
                 <a:latin typeface="Apple SD Gothic Neo"/>
                 <a:ea typeface="Apple SD Gothic Neo"/>
               </a:rPr>
-              <a:t>가정 맞추고 · </a:t>
+              <a:t>가정 맞추기 · </a:t>
             </a:r>
             <a:r>
               <a:rPr sz="1200" b="1">
@@ -30663,7 +30847,7 @@
         <p:spPr>
           <a:xfrm>
             <a:off x="320040" y="1024128"/>
-            <a:ext cx="6480048" cy="2880360"/>
+            <a:ext cx="6726115" cy="2880360"/>
           </a:xfrm>
           <a:prstGeom prst="rect">
             <a:avLst/>
@@ -31369,7 +31553,7 @@
                 <a:latin typeface="Apple SD Gothic Neo"/>
                 <a:ea typeface="Apple SD Gothic Neo"/>
               </a:rPr>
-              <a:t>–  훈련점(●) 동일 · x&gt;2 밖에서 가정별 예측이 </a:t>
+              <a:t>–  훈련 범위 — </a:t>
             </a:r>
             <a:r>
               <a:rPr sz="1100" b="1">
@@ -31379,7 +31563,17 @@
                 <a:latin typeface="Apple SD Gothic Neo"/>
                 <a:ea typeface="Apple SD Gothic Neo"/>
               </a:rPr>
-              <a:t>서로 다름</a:t>
+              <a:t>하나로 보임</a:t>
+            </a:r>
+            <a:r>
+              <a:rPr sz="1100" b="0">
+                <a:solidFill>
+                  <a:srgbClr val="A0ADBC"/>
+                </a:solidFill>
+                <a:latin typeface="Apple SD Gothic Neo"/>
+                <a:ea typeface="Apple SD Gothic Neo"/>
+              </a:rPr>
+              <a:t> (어떤 가정인지 데이터만으론 불명)</a:t>
             </a:r>
           </a:p>
           <a:p>
@@ -31399,7 +31593,47 @@
                 <a:latin typeface="Apple SD Gothic Neo"/>
                 <a:ea typeface="Apple SD Gothic Neo"/>
               </a:rPr>
-              <a:t>–  데이터는 같고 가정만 다름 = 오늘 발표 출발점</a:t>
+              <a:t>–  x&gt;2 밖 — 가정 A·B·C </a:t>
+            </a:r>
+            <a:r>
+              <a:rPr sz="1100" b="1">
+                <a:solidFill>
+                  <a:srgbClr val="A0ADBC"/>
+                </a:solidFill>
+                <a:latin typeface="Apple SD Gothic Neo"/>
+                <a:ea typeface="Apple SD Gothic Neo"/>
+              </a:rPr>
+              <a:t>연장</a:t>
+            </a:r>
+            <a:r>
+              <a:rPr sz="1100" b="0">
+                <a:solidFill>
+                  <a:srgbClr val="A0ADBC"/>
+                </a:solidFill>
+                <a:latin typeface="Apple SD Gothic Neo"/>
+                <a:ea typeface="Apple SD Gothic Neo"/>
+              </a:rPr>
+              <a:t>마다 예측 전부 다름</a:t>
+            </a:r>
+          </a:p>
+          <a:p>
+            <a:pPr algn="l">
+              <a:spcBef>
+                <a:spcPts val="300"/>
+              </a:spcBef>
+              <a:spcAft>
+                <a:spcPts val="0"/>
+              </a:spcAft>
+            </a:pPr>
+            <a:r>
+              <a:rPr sz="1100" b="0">
+                <a:solidFill>
+                  <a:srgbClr val="A0ADBC"/>
+                </a:solidFill>
+                <a:latin typeface="Apple SD Gothic Neo"/>
+                <a:ea typeface="Apple SD Gothic Neo"/>
+              </a:rPr>
+              <a:t>–  ≠ 세 모델을 동시에 fit · = 같은 데이터·다른 prior</a:t>
             </a:r>
           </a:p>
         </p:txBody>
